--- a/docs/月次売上処理タブ_操作マニュアル.pptx
+++ b/docs/月次売上処理タブ_操作マニュアル.pptx
@@ -13751,7 +13751,7 @@
                           </a:solidFill>
                           <a:latin typeface="Meiryo UI"/>
                         </a:rPr>
-                        <a:t>小計 × 税率（切り捨て）</a:t>
+                        <a:t>小計 × 税率（四捨五入）</a:t>
                       </a:r>
                     </a:p>
                   </a:txBody>
@@ -14565,7 +14565,7 @@
                           </a:solidFill>
                           <a:latin typeface="Meiryo UI"/>
                         </a:rPr>
-                        <a:t>上限額（総計との小さい方）</a:t>
+                        <a:t>上限額（総計との小さい方）／上限0円なら0円</a:t>
                       </a:r>
                     </a:p>
                   </a:txBody>
@@ -14636,7 +14636,7 @@
                           </a:solidFill>
                           <a:latin typeface="Meiryo UI"/>
                         </a:rPr>
-                        <a:t>総計×割合（切り上げ／上限額あればその範囲内）</a:t>
+                        <a:t>総計×割合（四捨五入／上限額あれば頭打ち）</a:t>
                       </a:r>
                     </a:p>
                   </a:txBody>
@@ -14870,7 +14870,7 @@
                 </a:solidFill>
                 <a:latin typeface="Meiryo UI"/>
               </a:rPr>
-              <a:t>📌 「一部負担」「1〜3割負担」では上限額を必ず入力</a:t>
+              <a:t>📌 「一部負担」「1〜3割負担」では上限額を確認</a:t>
             </a:r>
           </a:p>
           <a:p>
@@ -14889,7 +14889,7 @@
                 </a:solidFill>
                 <a:latin typeface="Meiryo UI"/>
               </a:rPr>
-              <a:t>「一部負担時の上限額」が0円のままだと、利用者負担額が正しく計算されません。</a:t>
+              <a:t>上限額0円のままだと、一部負担は負担額0円、1〜3割負担は上限なしで計算されます。</a:t>
             </a:r>
           </a:p>
         </p:txBody>
